--- a/hcml-seminar-kickoff-meeting-2026.pptx
+++ b/hcml-seminar-kickoff-meeting-2026.pptx
@@ -1507,7 +1507,7 @@
               <a:pPr>
                 <a:defRPr/>
               </a:pPr>
-              <a:t>9/23/26</a:t>
+              <a:t>10/15/26</a:t>
             </a:fld>
             <a:endParaRPr lang="fi-FI"/>
           </a:p>
@@ -1704,7 +1704,7 @@
               <a:pPr>
                 <a:defRPr/>
               </a:pPr>
-              <a:t>9/23/26</a:t>
+              <a:t>10/15/26</a:t>
             </a:fld>
             <a:endParaRPr lang="fi-FI"/>
           </a:p>
@@ -1911,7 +1911,7 @@
               <a:pPr>
                 <a:defRPr/>
               </a:pPr>
-              <a:t>9/23/26</a:t>
+              <a:t>10/15/26</a:t>
             </a:fld>
             <a:endParaRPr lang="fi-FI"/>
           </a:p>
@@ -2108,7 +2108,7 @@
               <a:pPr>
                 <a:defRPr/>
               </a:pPr>
-              <a:t>9/23/26</a:t>
+              <a:t>10/15/26</a:t>
             </a:fld>
             <a:endParaRPr lang="fi-FI"/>
           </a:p>
@@ -2328,7 +2328,7 @@
               <a:pPr>
                 <a:defRPr/>
               </a:pPr>
-              <a:t>9/23/26</a:t>
+              <a:t>10/15/26</a:t>
             </a:fld>
             <a:endParaRPr lang="fi-FI"/>
           </a:p>
@@ -2642,7 +2642,7 @@
               <a:pPr>
                 <a:defRPr/>
               </a:pPr>
-              <a:t>9/23/26</a:t>
+              <a:t>10/15/26</a:t>
             </a:fld>
             <a:endParaRPr lang="fi-FI"/>
           </a:p>
@@ -3095,7 +3095,7 @@
               <a:pPr>
                 <a:defRPr/>
               </a:pPr>
-              <a:t>9/23/26</a:t>
+              <a:t>10/15/26</a:t>
             </a:fld>
             <a:endParaRPr lang="fi-FI"/>
           </a:p>
@@ -3241,7 +3241,7 @@
               <a:pPr>
                 <a:defRPr/>
               </a:pPr>
-              <a:t>9/23/26</a:t>
+              <a:t>10/15/26</a:t>
             </a:fld>
             <a:endParaRPr lang="fi-FI"/>
           </a:p>
@@ -3365,7 +3365,7 @@
               <a:pPr>
                 <a:defRPr/>
               </a:pPr>
-              <a:t>9/23/26</a:t>
+              <a:t>10/15/26</a:t>
             </a:fld>
             <a:endParaRPr lang="fi-FI"/>
           </a:p>
@@ -3669,7 +3669,7 @@
               <a:pPr>
                 <a:defRPr/>
               </a:pPr>
-              <a:t>9/23/26</a:t>
+              <a:t>10/15/26</a:t>
             </a:fld>
             <a:endParaRPr lang="fi-FI"/>
           </a:p>
@@ -3951,7 +3951,7 @@
               <a:pPr>
                 <a:defRPr/>
               </a:pPr>
-              <a:t>9/23/26</a:t>
+              <a:t>10/15/26</a:t>
             </a:fld>
             <a:endParaRPr lang="fi-FI"/>
           </a:p>
@@ -4245,7 +4245,7 @@
               <a:pPr>
                 <a:defRPr/>
               </a:pPr>
-              <a:t>9/23/26</a:t>
+              <a:t>10/15/26</a:t>
             </a:fld>
             <a:endParaRPr lang="fi-FI"/>
           </a:p>
@@ -10422,224 +10422,6 @@
       </p:sp>
       <p:sp>
         <p:nvSpPr>
-          <p:cNvPr id="69" name="Title 2"/>
-          <p:cNvSpPr txBox="1">
-            <a:spLocks/>
-          </p:cNvSpPr>
-          <p:nvPr/>
-        </p:nvSpPr>
-        <p:spPr bwMode="auto">
-          <a:xfrm>
-            <a:off x="179512" y="1634778"/>
-            <a:ext cx="1339667" cy="498598"/>
-          </a:xfrm>
-          <a:prstGeom prst="rect">
-            <a:avLst/>
-          </a:prstGeom>
-          <a:noFill/>
-          <a:ln w="9525">
-            <a:noFill/>
-            <a:miter lim="800000"/>
-            <a:headEnd/>
-            <a:tailEnd/>
-          </a:ln>
-        </p:spPr>
-        <p:txBody>
-          <a:bodyPr vert="horz" wrap="square" lIns="0" tIns="0" rIns="0" bIns="0" numCol="1" anchor="ctr" anchorCtr="0" compatLnSpc="1">
-            <a:prstTxWarp prst="textNoShape">
-              <a:avLst/>
-            </a:prstTxWarp>
-            <a:spAutoFit/>
-          </a:bodyPr>
-          <a:lstStyle>
-            <a:lvl1pPr algn="l" rtl="0" eaLnBrk="0" fontAlgn="base" hangingPunct="0">
-              <a:spcBef>
-                <a:spcPct val="0"/>
-              </a:spcBef>
-              <a:spcAft>
-                <a:spcPct val="0"/>
-              </a:spcAft>
-              <a:defRPr sz="4400" b="1">
-                <a:solidFill>
-                  <a:srgbClr val="FFFFFF"/>
-                </a:solidFill>
-                <a:latin typeface="+mj-lt"/>
-                <a:ea typeface="+mj-ea"/>
-                <a:cs typeface="+mj-cs"/>
-              </a:defRPr>
-            </a:lvl1pPr>
-            <a:lvl2pPr algn="l" rtl="0" eaLnBrk="0" fontAlgn="base" hangingPunct="0">
-              <a:spcBef>
-                <a:spcPct val="0"/>
-              </a:spcBef>
-              <a:spcAft>
-                <a:spcPct val="0"/>
-              </a:spcAft>
-              <a:defRPr sz="4400" b="1">
-                <a:solidFill>
-                  <a:srgbClr val="FFFFFF"/>
-                </a:solidFill>
-                <a:latin typeface="Arial" pitchFamily="34" charset="0"/>
-                <a:ea typeface="DejaVu Sans"/>
-                <a:cs typeface="DejaVu Sans"/>
-              </a:defRPr>
-            </a:lvl2pPr>
-            <a:lvl3pPr algn="l" rtl="0" eaLnBrk="0" fontAlgn="base" hangingPunct="0">
-              <a:spcBef>
-                <a:spcPct val="0"/>
-              </a:spcBef>
-              <a:spcAft>
-                <a:spcPct val="0"/>
-              </a:spcAft>
-              <a:defRPr sz="4400" b="1">
-                <a:solidFill>
-                  <a:srgbClr val="FFFFFF"/>
-                </a:solidFill>
-                <a:latin typeface="Arial" pitchFamily="34" charset="0"/>
-                <a:ea typeface="DejaVu Sans"/>
-                <a:cs typeface="DejaVu Sans"/>
-              </a:defRPr>
-            </a:lvl3pPr>
-            <a:lvl4pPr algn="l" rtl="0" eaLnBrk="0" fontAlgn="base" hangingPunct="0">
-              <a:spcBef>
-                <a:spcPct val="0"/>
-              </a:spcBef>
-              <a:spcAft>
-                <a:spcPct val="0"/>
-              </a:spcAft>
-              <a:defRPr sz="4400" b="1">
-                <a:solidFill>
-                  <a:srgbClr val="FFFFFF"/>
-                </a:solidFill>
-                <a:latin typeface="Arial" pitchFamily="34" charset="0"/>
-                <a:ea typeface="DejaVu Sans"/>
-                <a:cs typeface="DejaVu Sans"/>
-              </a:defRPr>
-            </a:lvl4pPr>
-            <a:lvl5pPr algn="l" rtl="0" eaLnBrk="0" fontAlgn="base" hangingPunct="0">
-              <a:spcBef>
-                <a:spcPct val="0"/>
-              </a:spcBef>
-              <a:spcAft>
-                <a:spcPct val="0"/>
-              </a:spcAft>
-              <a:defRPr sz="4400" b="1">
-                <a:solidFill>
-                  <a:srgbClr val="FFFFFF"/>
-                </a:solidFill>
-                <a:latin typeface="Arial" pitchFamily="34" charset="0"/>
-                <a:ea typeface="DejaVu Sans"/>
-                <a:cs typeface="DejaVu Sans"/>
-              </a:defRPr>
-            </a:lvl5pPr>
-            <a:lvl6pPr marL="457200" algn="l" rtl="0" eaLnBrk="0" fontAlgn="base" hangingPunct="0">
-              <a:spcBef>
-                <a:spcPct val="0"/>
-              </a:spcBef>
-              <a:spcAft>
-                <a:spcPct val="0"/>
-              </a:spcAft>
-              <a:defRPr sz="4400" b="1">
-                <a:solidFill>
-                  <a:srgbClr val="FFFFFF"/>
-                </a:solidFill>
-                <a:latin typeface="Arial" pitchFamily="34" charset="0"/>
-                <a:ea typeface="DejaVu Sans"/>
-                <a:cs typeface="DejaVu Sans"/>
-              </a:defRPr>
-            </a:lvl6pPr>
-            <a:lvl7pPr marL="914400" algn="l" rtl="0" eaLnBrk="0" fontAlgn="base" hangingPunct="0">
-              <a:spcBef>
-                <a:spcPct val="0"/>
-              </a:spcBef>
-              <a:spcAft>
-                <a:spcPct val="0"/>
-              </a:spcAft>
-              <a:defRPr sz="4400" b="1">
-                <a:solidFill>
-                  <a:srgbClr val="FFFFFF"/>
-                </a:solidFill>
-                <a:latin typeface="Arial" pitchFamily="34" charset="0"/>
-                <a:ea typeface="DejaVu Sans"/>
-                <a:cs typeface="DejaVu Sans"/>
-              </a:defRPr>
-            </a:lvl7pPr>
-            <a:lvl8pPr marL="1371600" algn="l" rtl="0" eaLnBrk="0" fontAlgn="base" hangingPunct="0">
-              <a:spcBef>
-                <a:spcPct val="0"/>
-              </a:spcBef>
-              <a:spcAft>
-                <a:spcPct val="0"/>
-              </a:spcAft>
-              <a:defRPr sz="4400" b="1">
-                <a:solidFill>
-                  <a:srgbClr val="FFFFFF"/>
-                </a:solidFill>
-                <a:latin typeface="Arial" pitchFamily="34" charset="0"/>
-                <a:ea typeface="DejaVu Sans"/>
-                <a:cs typeface="DejaVu Sans"/>
-              </a:defRPr>
-            </a:lvl8pPr>
-            <a:lvl9pPr marL="1828800" algn="l" rtl="0" eaLnBrk="0" fontAlgn="base" hangingPunct="0">
-              <a:spcBef>
-                <a:spcPct val="0"/>
-              </a:spcBef>
-              <a:spcAft>
-                <a:spcPct val="0"/>
-              </a:spcAft>
-              <a:defRPr sz="4400" b="1">
-                <a:solidFill>
-                  <a:srgbClr val="FFFFFF"/>
-                </a:solidFill>
-                <a:latin typeface="Arial" pitchFamily="34" charset="0"/>
-                <a:ea typeface="DejaVu Sans"/>
-                <a:cs typeface="DejaVu Sans"/>
-              </a:defRPr>
-            </a:lvl9pPr>
-          </a:lstStyle>
-          <a:p>
-            <a:pPr algn="r" eaLnBrk="1">
-              <a:lnSpc>
-                <a:spcPct val="90000"/>
-              </a:lnSpc>
-            </a:pPr>
-            <a:r>
-              <a:rPr lang="en-US" sz="1800" b="0" dirty="0">
-                <a:solidFill>
-                  <a:schemeClr val="tx1"/>
-                </a:solidFill>
-                <a:latin typeface="Calibri"/>
-              </a:rPr>
-              <a:t>Registration </a:t>
-            </a:r>
-            <a:br>
-              <a:rPr lang="en-US" sz="1800" b="0" dirty="0">
-                <a:solidFill>
-                  <a:schemeClr val="tx1"/>
-                </a:solidFill>
-                <a:latin typeface="Calibri"/>
-              </a:rPr>
-            </a:br>
-            <a:r>
-              <a:rPr lang="en-US" sz="1800" b="0" dirty="0">
-                <a:solidFill>
-                  <a:schemeClr val="tx1"/>
-                </a:solidFill>
-                <a:latin typeface="Calibri"/>
-              </a:rPr>
-              <a:t>deadline</a:t>
-            </a:r>
-            <a:endParaRPr lang="en-US" sz="1800" b="0" baseline="30000" dirty="0">
-              <a:solidFill>
-                <a:schemeClr val="tx1"/>
-              </a:solidFill>
-              <a:latin typeface="Calibri"/>
-            </a:endParaRPr>
-          </a:p>
-        </p:txBody>
-      </p:sp>
-      <p:sp>
-        <p:nvSpPr>
           <p:cNvPr id="15" name="Title 2">
             <a:extLst>
               <a:ext uri="{FF2B5EF4-FFF2-40B4-BE49-F238E27FC236}">
@@ -11700,41 +11482,6 @@
       </p:cxnSp>
       <p:cxnSp>
         <p:nvCxnSpPr>
-          <p:cNvPr id="3" name="Straight Connector 2">
-            <a:extLst>
-              <a:ext uri="{FF2B5EF4-FFF2-40B4-BE49-F238E27FC236}">
-                <a16:creationId xmlns:a16="http://schemas.microsoft.com/office/drawing/2014/main" id="{1A5E161B-CCC4-B7BF-5A69-6ACD942269E2}"/>
-              </a:ext>
-            </a:extLst>
-          </p:cNvPr>
-          <p:cNvCxnSpPr/>
-          <p:nvPr/>
-        </p:nvCxnSpPr>
-        <p:spPr bwMode="auto">
-          <a:xfrm>
-            <a:off x="1305715" y="1412972"/>
-            <a:ext cx="0" cy="144016"/>
-          </a:xfrm>
-          <a:prstGeom prst="line">
-            <a:avLst/>
-          </a:prstGeom>
-          <a:solidFill>
-            <a:schemeClr val="accent1"/>
-          </a:solidFill>
-          <a:ln w="25400" cap="flat" cmpd="sng" algn="ctr">
-            <a:solidFill>
-              <a:schemeClr val="tx1"/>
-            </a:solidFill>
-            <a:prstDash val="solid"/>
-            <a:round/>
-            <a:headEnd type="none" w="med" len="med"/>
-            <a:tailEnd type="none" w="med" len="med"/>
-          </a:ln>
-          <a:effectLst/>
-        </p:spPr>
-      </p:cxnSp>
-      <p:cxnSp>
-        <p:nvCxnSpPr>
           <p:cNvPr id="4" name="Straight Connector 3">
             <a:extLst>
               <a:ext uri="{FF2B5EF4-FFF2-40B4-BE49-F238E27FC236}">
@@ -11763,84 +11510,6 @@
               <a:schemeClr val="tx1"/>
             </a:solidFill>
             <a:prstDash val="dash"/>
-            <a:round/>
-            <a:headEnd type="none" w="med" len="med"/>
-            <a:tailEnd type="none" w="med" len="med"/>
-          </a:ln>
-          <a:effectLst/>
-        </p:spPr>
-      </p:cxnSp>
-      <p:sp>
-        <p:nvSpPr>
-          <p:cNvPr id="5" name="Rectangle 4">
-            <a:extLst>
-              <a:ext uri="{FF2B5EF4-FFF2-40B4-BE49-F238E27FC236}">
-                <a16:creationId xmlns:a16="http://schemas.microsoft.com/office/drawing/2014/main" id="{347C8780-FEFB-FBB0-B079-E6D04C960536}"/>
-              </a:ext>
-            </a:extLst>
-          </p:cNvPr>
-          <p:cNvSpPr/>
-          <p:nvPr/>
-        </p:nvSpPr>
-        <p:spPr>
-          <a:xfrm>
-            <a:off x="849346" y="1135307"/>
-            <a:ext cx="875957" cy="276999"/>
-          </a:xfrm>
-          <a:prstGeom prst="rect">
-            <a:avLst/>
-          </a:prstGeom>
-        </p:spPr>
-        <p:txBody>
-          <a:bodyPr wrap="square">
-            <a:spAutoFit/>
-          </a:bodyPr>
-          <a:lstStyle/>
-          <a:p>
-            <a:pPr algn="ctr"/>
-            <a:r>
-              <a:rPr lang="en-US" sz="1200" b="1" dirty="0">
-                <a:solidFill>
-                  <a:schemeClr val="tx1">
-                    <a:lumMod val="75000"/>
-                    <a:lumOff val="25000"/>
-                  </a:schemeClr>
-                </a:solidFill>
-                <a:latin typeface="Calibri"/>
-              </a:rPr>
-              <a:t>Oct 31</a:t>
-            </a:r>
-          </a:p>
-        </p:txBody>
-      </p:sp>
-      <p:cxnSp>
-        <p:nvCxnSpPr>
-          <p:cNvPr id="6" name="Straight Connector 5">
-            <a:extLst>
-              <a:ext uri="{FF2B5EF4-FFF2-40B4-BE49-F238E27FC236}">
-                <a16:creationId xmlns:a16="http://schemas.microsoft.com/office/drawing/2014/main" id="{47974A53-FAA3-F12B-E86E-E61FB4CE5694}"/>
-              </a:ext>
-            </a:extLst>
-          </p:cNvPr>
-          <p:cNvCxnSpPr/>
-          <p:nvPr/>
-        </p:nvCxnSpPr>
-        <p:spPr bwMode="auto">
-          <a:xfrm>
-            <a:off x="2086806" y="1412972"/>
-            <a:ext cx="0" cy="144016"/>
-          </a:xfrm>
-          <a:prstGeom prst="line">
-            <a:avLst/>
-          </a:prstGeom>
-          <a:solidFill>
-            <a:schemeClr val="accent1"/>
-          </a:solidFill>
-          <a:ln w="25400" cap="flat" cmpd="sng" algn="ctr">
-            <a:solidFill>
-              <a:schemeClr val="tx1"/>
-            </a:solidFill>
-            <a:prstDash val="solid"/>
             <a:round/>
             <a:headEnd type="none" w="med" len="med"/>
             <a:tailEnd type="none" w="med" len="med"/>
@@ -12147,256 +11816,6 @@
               </a:solidFill>
               <a:latin typeface="Calibri"/>
             </a:endParaRPr>
-          </a:p>
-        </p:txBody>
-      </p:sp>
-      <p:sp>
-        <p:nvSpPr>
-          <p:cNvPr id="22" name="Title 2">
-            <a:extLst>
-              <a:ext uri="{FF2B5EF4-FFF2-40B4-BE49-F238E27FC236}">
-                <a16:creationId xmlns:a16="http://schemas.microsoft.com/office/drawing/2014/main" id="{48056390-D630-6E1A-E68F-A1D0F2977C71}"/>
-              </a:ext>
-            </a:extLst>
-          </p:cNvPr>
-          <p:cNvSpPr txBox="1">
-            <a:spLocks/>
-          </p:cNvSpPr>
-          <p:nvPr/>
-        </p:nvSpPr>
-        <p:spPr bwMode="auto">
-          <a:xfrm>
-            <a:off x="1531189" y="1654526"/>
-            <a:ext cx="1339667" cy="498598"/>
-          </a:xfrm>
-          <a:prstGeom prst="rect">
-            <a:avLst/>
-          </a:prstGeom>
-          <a:noFill/>
-          <a:ln w="9525">
-            <a:noFill/>
-            <a:miter lim="800000"/>
-            <a:headEnd/>
-            <a:tailEnd/>
-          </a:ln>
-        </p:spPr>
-        <p:txBody>
-          <a:bodyPr vert="horz" wrap="square" lIns="0" tIns="0" rIns="0" bIns="0" numCol="1" anchor="ctr" anchorCtr="0" compatLnSpc="1">
-            <a:prstTxWarp prst="textNoShape">
-              <a:avLst/>
-            </a:prstTxWarp>
-            <a:spAutoFit/>
-          </a:bodyPr>
-          <a:lstStyle>
-            <a:lvl1pPr algn="l" rtl="0" eaLnBrk="0" fontAlgn="base" hangingPunct="0">
-              <a:spcBef>
-                <a:spcPct val="0"/>
-              </a:spcBef>
-              <a:spcAft>
-                <a:spcPct val="0"/>
-              </a:spcAft>
-              <a:defRPr sz="4400" b="1">
-                <a:solidFill>
-                  <a:srgbClr val="FFFFFF"/>
-                </a:solidFill>
-                <a:latin typeface="+mj-lt"/>
-                <a:ea typeface="+mj-ea"/>
-                <a:cs typeface="+mj-cs"/>
-              </a:defRPr>
-            </a:lvl1pPr>
-            <a:lvl2pPr algn="l" rtl="0" eaLnBrk="0" fontAlgn="base" hangingPunct="0">
-              <a:spcBef>
-                <a:spcPct val="0"/>
-              </a:spcBef>
-              <a:spcAft>
-                <a:spcPct val="0"/>
-              </a:spcAft>
-              <a:defRPr sz="4400" b="1">
-                <a:solidFill>
-                  <a:srgbClr val="FFFFFF"/>
-                </a:solidFill>
-                <a:latin typeface="Arial" pitchFamily="34" charset="0"/>
-                <a:ea typeface="DejaVu Sans"/>
-                <a:cs typeface="DejaVu Sans"/>
-              </a:defRPr>
-            </a:lvl2pPr>
-            <a:lvl3pPr algn="l" rtl="0" eaLnBrk="0" fontAlgn="base" hangingPunct="0">
-              <a:spcBef>
-                <a:spcPct val="0"/>
-              </a:spcBef>
-              <a:spcAft>
-                <a:spcPct val="0"/>
-              </a:spcAft>
-              <a:defRPr sz="4400" b="1">
-                <a:solidFill>
-                  <a:srgbClr val="FFFFFF"/>
-                </a:solidFill>
-                <a:latin typeface="Arial" pitchFamily="34" charset="0"/>
-                <a:ea typeface="DejaVu Sans"/>
-                <a:cs typeface="DejaVu Sans"/>
-              </a:defRPr>
-            </a:lvl3pPr>
-            <a:lvl4pPr algn="l" rtl="0" eaLnBrk="0" fontAlgn="base" hangingPunct="0">
-              <a:spcBef>
-                <a:spcPct val="0"/>
-              </a:spcBef>
-              <a:spcAft>
-                <a:spcPct val="0"/>
-              </a:spcAft>
-              <a:defRPr sz="4400" b="1">
-                <a:solidFill>
-                  <a:srgbClr val="FFFFFF"/>
-                </a:solidFill>
-                <a:latin typeface="Arial" pitchFamily="34" charset="0"/>
-                <a:ea typeface="DejaVu Sans"/>
-                <a:cs typeface="DejaVu Sans"/>
-              </a:defRPr>
-            </a:lvl4pPr>
-            <a:lvl5pPr algn="l" rtl="0" eaLnBrk="0" fontAlgn="base" hangingPunct="0">
-              <a:spcBef>
-                <a:spcPct val="0"/>
-              </a:spcBef>
-              <a:spcAft>
-                <a:spcPct val="0"/>
-              </a:spcAft>
-              <a:defRPr sz="4400" b="1">
-                <a:solidFill>
-                  <a:srgbClr val="FFFFFF"/>
-                </a:solidFill>
-                <a:latin typeface="Arial" pitchFamily="34" charset="0"/>
-                <a:ea typeface="DejaVu Sans"/>
-                <a:cs typeface="DejaVu Sans"/>
-              </a:defRPr>
-            </a:lvl5pPr>
-            <a:lvl6pPr marL="457200" algn="l" rtl="0" eaLnBrk="0" fontAlgn="base" hangingPunct="0">
-              <a:spcBef>
-                <a:spcPct val="0"/>
-              </a:spcBef>
-              <a:spcAft>
-                <a:spcPct val="0"/>
-              </a:spcAft>
-              <a:defRPr sz="4400" b="1">
-                <a:solidFill>
-                  <a:srgbClr val="FFFFFF"/>
-                </a:solidFill>
-                <a:latin typeface="Arial" pitchFamily="34" charset="0"/>
-                <a:ea typeface="DejaVu Sans"/>
-                <a:cs typeface="DejaVu Sans"/>
-              </a:defRPr>
-            </a:lvl6pPr>
-            <a:lvl7pPr marL="914400" algn="l" rtl="0" eaLnBrk="0" fontAlgn="base" hangingPunct="0">
-              <a:spcBef>
-                <a:spcPct val="0"/>
-              </a:spcBef>
-              <a:spcAft>
-                <a:spcPct val="0"/>
-              </a:spcAft>
-              <a:defRPr sz="4400" b="1">
-                <a:solidFill>
-                  <a:srgbClr val="FFFFFF"/>
-                </a:solidFill>
-                <a:latin typeface="Arial" pitchFamily="34" charset="0"/>
-                <a:ea typeface="DejaVu Sans"/>
-                <a:cs typeface="DejaVu Sans"/>
-              </a:defRPr>
-            </a:lvl7pPr>
-            <a:lvl8pPr marL="1371600" algn="l" rtl="0" eaLnBrk="0" fontAlgn="base" hangingPunct="0">
-              <a:spcBef>
-                <a:spcPct val="0"/>
-              </a:spcBef>
-              <a:spcAft>
-                <a:spcPct val="0"/>
-              </a:spcAft>
-              <a:defRPr sz="4400" b="1">
-                <a:solidFill>
-                  <a:srgbClr val="FFFFFF"/>
-                </a:solidFill>
-                <a:latin typeface="Arial" pitchFamily="34" charset="0"/>
-                <a:ea typeface="DejaVu Sans"/>
-                <a:cs typeface="DejaVu Sans"/>
-              </a:defRPr>
-            </a:lvl8pPr>
-            <a:lvl9pPr marL="1828800" algn="l" rtl="0" eaLnBrk="0" fontAlgn="base" hangingPunct="0">
-              <a:spcBef>
-                <a:spcPct val="0"/>
-              </a:spcBef>
-              <a:spcAft>
-                <a:spcPct val="0"/>
-              </a:spcAft>
-              <a:defRPr sz="4400" b="1">
-                <a:solidFill>
-                  <a:srgbClr val="FFFFFF"/>
-                </a:solidFill>
-                <a:latin typeface="Arial" pitchFamily="34" charset="0"/>
-                <a:ea typeface="DejaVu Sans"/>
-                <a:cs typeface="DejaVu Sans"/>
-              </a:defRPr>
-            </a:lvl9pPr>
-          </a:lstStyle>
-          <a:p>
-            <a:pPr algn="ctr" eaLnBrk="1">
-              <a:lnSpc>
-                <a:spcPct val="90000"/>
-              </a:lnSpc>
-            </a:pPr>
-            <a:r>
-              <a:rPr lang="en-US" sz="1800" b="0" dirty="0">
-                <a:solidFill>
-                  <a:schemeClr val="tx1"/>
-                </a:solidFill>
-                <a:latin typeface="Calibri"/>
-              </a:rPr>
-              <a:t>Acceptance notification</a:t>
-            </a:r>
-            <a:endParaRPr lang="en-US" sz="1800" b="0" baseline="30000" dirty="0">
-              <a:solidFill>
-                <a:schemeClr val="tx1"/>
-              </a:solidFill>
-              <a:latin typeface="Calibri"/>
-            </a:endParaRPr>
-          </a:p>
-        </p:txBody>
-      </p:sp>
-      <p:sp>
-        <p:nvSpPr>
-          <p:cNvPr id="23" name="Rectangle 22">
-            <a:extLst>
-              <a:ext uri="{FF2B5EF4-FFF2-40B4-BE49-F238E27FC236}">
-                <a16:creationId xmlns:a16="http://schemas.microsoft.com/office/drawing/2014/main" id="{D131A9DE-520B-A5F7-A276-0F8A8134560F}"/>
-              </a:ext>
-            </a:extLst>
-          </p:cNvPr>
-          <p:cNvSpPr/>
-          <p:nvPr/>
-        </p:nvSpPr>
-        <p:spPr>
-          <a:xfrm>
-            <a:off x="1652256" y="1134345"/>
-            <a:ext cx="875957" cy="276999"/>
-          </a:xfrm>
-          <a:prstGeom prst="rect">
-            <a:avLst/>
-          </a:prstGeom>
-        </p:spPr>
-        <p:txBody>
-          <a:bodyPr wrap="square">
-            <a:spAutoFit/>
-          </a:bodyPr>
-          <a:lstStyle/>
-          <a:p>
-            <a:pPr algn="ctr"/>
-            <a:r>
-              <a:rPr lang="en-US" sz="1200" b="1" dirty="0">
-                <a:solidFill>
-                  <a:schemeClr val="tx1">
-                    <a:lumMod val="75000"/>
-                    <a:lumOff val="25000"/>
-                  </a:schemeClr>
-                </a:solidFill>
-                <a:latin typeface="Calibri"/>
-              </a:rPr>
-              <a:t>Nov 6</a:t>
-            </a:r>
           </a:p>
         </p:txBody>
       </p:sp>
